--- a/assets/figures-editable/c1-c2/c2-e11.pptx
+++ b/assets/figures-editable/c1-c2/c2-e11.pptx
@@ -7,7 +7,7 @@
   <p:sldIdLst>
     <p:sldId id="256" r:id="rId7"/>
   </p:sldIdLst>
-  <p:sldSz cx="11948160" cy="7924799" type="screen4x3"/>
+  <p:sldSz cx="12191695" cy="6858000" type="screen4x3"/>
   <p:notesSz cx="6858000" cy="9144000"/>
   <p:defaultTextStyle>
     <a:defPPr>
@@ -3098,14 +3098,14 @@
       <p:grpSpPr/>
       <p:sp>
         <p:nvSpPr>
-          <p:cNvPr id="2" name="text1" descr="sci-ppt:C2-E11-001"/>
+          <p:cNvPr id="2" name="C2-E11 text 0" descr="sci-ppt:o000"/>
           <p:cNvSpPr txBox="1"/>
           <p:nvPr/>
         </p:nvSpPr>
         <p:spPr>
           <a:xfrm>
-            <a:off x="316992" y="268224"/>
-            <a:ext cx="11277600" cy="359054"/>
+            <a:off x="274320" y="118872"/>
+            <a:ext cx="11612880" cy="340105"/>
           </a:xfrm>
           <a:prstGeom prst="rect">
             <a:avLst/>
@@ -3114,7 +3114,7 @@
           <a:effectLst/>
         </p:spPr>
         <p:txBody>
-          <a:bodyPr wrap="none" lIns="27432" rIns="27432" tIns="18288" bIns="18288" anchor="ctr">
+          <a:bodyPr wrap="none" lIns="18288" rIns="18288" tIns="18288" bIns="18288" anchor="t">
             <a:spAutoFit/>
           </a:bodyPr>
           <a:lstStyle/>
@@ -3125,37 +3125,1303 @@
               </a:spcAft>
             </a:pPr>
             <a:r>
-              <a:rPr sz="1823" b="0" i="0">
+              <a:rPr sz="1900" b="1" i="0">
                 <a:solidFill>
                   <a:srgbClr val="8EDBD4"/>
                 </a:solidFill>
                 <a:latin typeface="Arial"/>
               </a:rPr>
-              <a:t>C2-E11 | Physical-variable diagram</a:t>
-            </a:r>
-          </a:p>
-        </p:txBody>
-      </p:sp>
-      <p:sp>
-        <p:nvSpPr>
-          <p:cNvPr id="3" name="ellipse2" descr="sci-ppt:C2-E11-002"/>
+              <a:t>C2-E11 · Static capillary and shell-pressure control</a:t>
+            </a:r>
+          </a:p>
+        </p:txBody>
+      </p:sp>
+      <p:cxnSp>
+        <p:nvCxnSpPr>
+          <p:cNvPr id="3" name="C2-E11 line 1" descr="sci-ppt:o001"/>
+          <p:cNvCxnSpPr/>
+          <p:nvPr/>
+        </p:nvCxnSpPr>
+        <p:spPr>
+          <a:xfrm>
+            <a:off x="6126480" y="5029200"/>
+            <a:ext cx="5486400" cy="0"/>
+          </a:xfrm>
+          <a:prstGeom prst="line">
+            <a:avLst/>
+          </a:prstGeom>
+          <a:ln w="19050">
+            <a:solidFill>
+              <a:srgbClr val="B4C7D2"/>
+            </a:solidFill>
+          </a:ln>
+          <a:effectLst/>
+        </p:spPr>
+      </p:cxnSp>
+      <p:cxnSp>
+        <p:nvCxnSpPr>
+          <p:cNvPr id="4" name="C2-E11 line 2" descr="sci-ppt:o002"/>
+          <p:cNvCxnSpPr/>
+          <p:nvPr/>
+        </p:nvCxnSpPr>
+        <p:spPr>
+          <a:xfrm>
+            <a:off x="6126480" y="1371600"/>
+            <a:ext cx="0" cy="3657600"/>
+          </a:xfrm>
+          <a:prstGeom prst="line">
+            <a:avLst/>
+          </a:prstGeom>
+          <a:ln w="19050">
+            <a:solidFill>
+              <a:srgbClr val="B4C7D2"/>
+            </a:solidFill>
+          </a:ln>
+          <a:effectLst/>
+        </p:spPr>
+      </p:cxnSp>
+      <p:cxnSp>
+        <p:nvCxnSpPr>
+          <p:cNvPr id="5" name="C2-E11 line 3" descr="sci-ppt:o003"/>
+          <p:cNvCxnSpPr/>
+          <p:nvPr/>
+        </p:nvCxnSpPr>
+        <p:spPr>
+          <a:xfrm>
+            <a:off x="6677003" y="5029200"/>
+            <a:ext cx="0" cy="64008"/>
+          </a:xfrm>
+          <a:prstGeom prst="line">
+            <a:avLst/>
+          </a:prstGeom>
+          <a:ln w="12700">
+            <a:solidFill>
+              <a:srgbClr val="B4C7D2"/>
+            </a:solidFill>
+          </a:ln>
+          <a:effectLst/>
+        </p:spPr>
+      </p:cxnSp>
+      <p:cxnSp>
+        <p:nvCxnSpPr>
+          <p:cNvPr id="6" name="C2-E11 line 4" descr="sci-ppt:o004"/>
+          <p:cNvCxnSpPr/>
+          <p:nvPr/>
+        </p:nvCxnSpPr>
+        <p:spPr>
+          <a:xfrm>
+            <a:off x="6677003" y="1371600"/>
+            <a:ext cx="0" cy="3657600"/>
+          </a:xfrm>
+          <a:prstGeom prst="line">
+            <a:avLst/>
+          </a:prstGeom>
+          <a:ln w="7620">
+            <a:solidFill>
+              <a:srgbClr val="2E4756"/>
+            </a:solidFill>
+          </a:ln>
+          <a:effectLst/>
+        </p:spPr>
+      </p:cxnSp>
+      <p:sp>
+        <p:nvSpPr>
+          <p:cNvPr id="7" name="C2-E11 text 5" descr="sci-ppt:o005"/>
+          <p:cNvSpPr txBox="1"/>
+          <p:nvPr/>
+        </p:nvSpPr>
+        <p:spPr>
+          <a:xfrm>
+            <a:off x="6219803" y="5111496"/>
+            <a:ext cx="914400" cy="208407"/>
+          </a:xfrm>
+          <a:prstGeom prst="rect">
+            <a:avLst/>
+          </a:prstGeom>
+          <a:noFill/>
+          <a:effectLst/>
+        </p:spPr>
+        <p:txBody>
+          <a:bodyPr wrap="none" lIns="18288" rIns="18288" tIns="18288" bIns="18288" anchor="t">
+            <a:spAutoFit/>
+          </a:bodyPr>
+          <a:lstStyle/>
+          <a:p>
+            <a:pPr algn="ctr">
+              <a:spcAft>
+                <a:spcPts val="0"/>
+              </a:spcAft>
+            </a:pPr>
+            <a:r>
+              <a:rPr sz="1050" b="0" i="0">
+                <a:solidFill>
+                  <a:srgbClr val="B4C7D2"/>
+                </a:solidFill>
+                <a:latin typeface="Arial"/>
+              </a:rPr>
+              <a:t>1e-07</a:t>
+            </a:r>
+          </a:p>
+        </p:txBody>
+      </p:sp>
+      <p:cxnSp>
+        <p:nvCxnSpPr>
+          <p:cNvPr id="8" name="C2-E11 line 6" descr="sci-ppt:o006"/>
+          <p:cNvCxnSpPr/>
+          <p:nvPr/>
+        </p:nvCxnSpPr>
+        <p:spPr>
+          <a:xfrm>
+            <a:off x="8505803" y="5029200"/>
+            <a:ext cx="0" cy="64008"/>
+          </a:xfrm>
+          <a:prstGeom prst="line">
+            <a:avLst/>
+          </a:prstGeom>
+          <a:ln w="12700">
+            <a:solidFill>
+              <a:srgbClr val="B4C7D2"/>
+            </a:solidFill>
+          </a:ln>
+          <a:effectLst/>
+        </p:spPr>
+      </p:cxnSp>
+      <p:cxnSp>
+        <p:nvCxnSpPr>
+          <p:cNvPr id="9" name="C2-E11 line 7" descr="sci-ppt:o007"/>
+          <p:cNvCxnSpPr/>
+          <p:nvPr/>
+        </p:nvCxnSpPr>
+        <p:spPr>
+          <a:xfrm>
+            <a:off x="8505803" y="1371600"/>
+            <a:ext cx="0" cy="3657600"/>
+          </a:xfrm>
+          <a:prstGeom prst="line">
+            <a:avLst/>
+          </a:prstGeom>
+          <a:ln w="7620">
+            <a:solidFill>
+              <a:srgbClr val="2E4756"/>
+            </a:solidFill>
+          </a:ln>
+          <a:effectLst/>
+        </p:spPr>
+      </p:cxnSp>
+      <p:sp>
+        <p:nvSpPr>
+          <p:cNvPr id="10" name="C2-E11 text 8" descr="sci-ppt:o008"/>
+          <p:cNvSpPr txBox="1"/>
+          <p:nvPr/>
+        </p:nvSpPr>
+        <p:spPr>
+          <a:xfrm>
+            <a:off x="8048603" y="5111496"/>
+            <a:ext cx="914400" cy="208407"/>
+          </a:xfrm>
+          <a:prstGeom prst="rect">
+            <a:avLst/>
+          </a:prstGeom>
+          <a:noFill/>
+          <a:effectLst/>
+        </p:spPr>
+        <p:txBody>
+          <a:bodyPr wrap="none" lIns="18288" rIns="18288" tIns="18288" bIns="18288" anchor="t">
+            <a:spAutoFit/>
+          </a:bodyPr>
+          <a:lstStyle/>
+          <a:p>
+            <a:pPr algn="ctr">
+              <a:spcAft>
+                <a:spcPts val="0"/>
+              </a:spcAft>
+            </a:pPr>
+            <a:r>
+              <a:rPr sz="1050" b="0" i="0">
+                <a:solidFill>
+                  <a:srgbClr val="B4C7D2"/>
+                </a:solidFill>
+                <a:latin typeface="Arial"/>
+              </a:rPr>
+              <a:t>1e-06</a:t>
+            </a:r>
+          </a:p>
+        </p:txBody>
+      </p:sp>
+      <p:cxnSp>
+        <p:nvCxnSpPr>
+          <p:cNvPr id="11" name="C2-E11 line 9" descr="sci-ppt:o009"/>
+          <p:cNvCxnSpPr/>
+          <p:nvPr/>
+        </p:nvCxnSpPr>
+        <p:spPr>
+          <a:xfrm>
+            <a:off x="10334603" y="5029200"/>
+            <a:ext cx="0" cy="64008"/>
+          </a:xfrm>
+          <a:prstGeom prst="line">
+            <a:avLst/>
+          </a:prstGeom>
+          <a:ln w="12700">
+            <a:solidFill>
+              <a:srgbClr val="B4C7D2"/>
+            </a:solidFill>
+          </a:ln>
+          <a:effectLst/>
+        </p:spPr>
+      </p:cxnSp>
+      <p:cxnSp>
+        <p:nvCxnSpPr>
+          <p:cNvPr id="12" name="C2-E11 line 10" descr="sci-ppt:o010"/>
+          <p:cNvCxnSpPr/>
+          <p:nvPr/>
+        </p:nvCxnSpPr>
+        <p:spPr>
+          <a:xfrm>
+            <a:off x="10334603" y="1371600"/>
+            <a:ext cx="0" cy="3657600"/>
+          </a:xfrm>
+          <a:prstGeom prst="line">
+            <a:avLst/>
+          </a:prstGeom>
+          <a:ln w="7620">
+            <a:solidFill>
+              <a:srgbClr val="2E4756"/>
+            </a:solidFill>
+          </a:ln>
+          <a:effectLst/>
+        </p:spPr>
+      </p:cxnSp>
+      <p:sp>
+        <p:nvSpPr>
+          <p:cNvPr id="13" name="C2-E11 text 11" descr="sci-ppt:o011"/>
+          <p:cNvSpPr txBox="1"/>
+          <p:nvPr/>
+        </p:nvSpPr>
+        <p:spPr>
+          <a:xfrm>
+            <a:off x="9877403" y="5111496"/>
+            <a:ext cx="914400" cy="208407"/>
+          </a:xfrm>
+          <a:prstGeom prst="rect">
+            <a:avLst/>
+          </a:prstGeom>
+          <a:noFill/>
+          <a:effectLst/>
+        </p:spPr>
+        <p:txBody>
+          <a:bodyPr wrap="none" lIns="18288" rIns="18288" tIns="18288" bIns="18288" anchor="t">
+            <a:spAutoFit/>
+          </a:bodyPr>
+          <a:lstStyle/>
+          <a:p>
+            <a:pPr algn="ctr">
+              <a:spcAft>
+                <a:spcPts val="0"/>
+              </a:spcAft>
+            </a:pPr>
+            <a:r>
+              <a:rPr sz="1050" b="0" i="0">
+                <a:solidFill>
+                  <a:srgbClr val="B4C7D2"/>
+                </a:solidFill>
+                <a:latin typeface="Arial"/>
+              </a:rPr>
+              <a:t>1e-05</a:t>
+            </a:r>
+          </a:p>
+        </p:txBody>
+      </p:sp>
+      <p:cxnSp>
+        <p:nvCxnSpPr>
+          <p:cNvPr id="14" name="C2-E11 line 12" descr="sci-ppt:o012"/>
+          <p:cNvCxnSpPr/>
+          <p:nvPr/>
+        </p:nvCxnSpPr>
+        <p:spPr>
+          <a:xfrm>
+            <a:off x="6062472" y="5029200"/>
+            <a:ext cx="64008" cy="0"/>
+          </a:xfrm>
+          <a:prstGeom prst="line">
+            <a:avLst/>
+          </a:prstGeom>
+          <a:ln w="12700">
+            <a:solidFill>
+              <a:srgbClr val="B4C7D2"/>
+            </a:solidFill>
+          </a:ln>
+          <a:effectLst/>
+        </p:spPr>
+      </p:cxnSp>
+      <p:cxnSp>
+        <p:nvCxnSpPr>
+          <p:cNvPr id="15" name="C2-E11 line 13" descr="sci-ppt:o013"/>
+          <p:cNvCxnSpPr/>
+          <p:nvPr/>
+        </p:nvCxnSpPr>
+        <p:spPr>
+          <a:xfrm>
+            <a:off x="6126480" y="5029200"/>
+            <a:ext cx="5486400" cy="0"/>
+          </a:xfrm>
+          <a:prstGeom prst="line">
+            <a:avLst/>
+          </a:prstGeom>
+          <a:ln w="7620">
+            <a:solidFill>
+              <a:srgbClr val="2E4756"/>
+            </a:solidFill>
+          </a:ln>
+          <a:effectLst/>
+        </p:spPr>
+      </p:cxnSp>
+      <p:sp>
+        <p:nvSpPr>
+          <p:cNvPr id="16" name="C2-E11 text 14" descr="sci-ppt:o014"/>
+          <p:cNvSpPr txBox="1"/>
+          <p:nvPr/>
+        </p:nvSpPr>
+        <p:spPr>
+          <a:xfrm>
+            <a:off x="5257800" y="4946904"/>
+            <a:ext cx="777240" cy="208407"/>
+          </a:xfrm>
+          <a:prstGeom prst="rect">
+            <a:avLst/>
+          </a:prstGeom>
+          <a:noFill/>
+          <a:effectLst/>
+        </p:spPr>
+        <p:txBody>
+          <a:bodyPr wrap="none" lIns="18288" rIns="18288" tIns="18288" bIns="18288" anchor="t">
+            <a:spAutoFit/>
+          </a:bodyPr>
+          <a:lstStyle/>
+          <a:p>
+            <a:pPr algn="r">
+              <a:spcAft>
+                <a:spcPts val="0"/>
+              </a:spcAft>
+            </a:pPr>
+            <a:r>
+              <a:rPr sz="1050" b="0" i="0">
+                <a:solidFill>
+                  <a:srgbClr val="B4C7D2"/>
+                </a:solidFill>
+                <a:latin typeface="Arial"/>
+              </a:rPr>
+              <a:t>1e+03</a:t>
+            </a:r>
+          </a:p>
+        </p:txBody>
+      </p:sp>
+      <p:cxnSp>
+        <p:nvCxnSpPr>
+          <p:cNvPr id="17" name="C2-E11 line 15" descr="sci-ppt:o015"/>
+          <p:cNvCxnSpPr/>
+          <p:nvPr/>
+        </p:nvCxnSpPr>
+        <p:spPr>
+          <a:xfrm>
+            <a:off x="6062472" y="4114800"/>
+            <a:ext cx="64008" cy="0"/>
+          </a:xfrm>
+          <a:prstGeom prst="line">
+            <a:avLst/>
+          </a:prstGeom>
+          <a:ln w="12700">
+            <a:solidFill>
+              <a:srgbClr val="B4C7D2"/>
+            </a:solidFill>
+          </a:ln>
+          <a:effectLst/>
+        </p:spPr>
+      </p:cxnSp>
+      <p:cxnSp>
+        <p:nvCxnSpPr>
+          <p:cNvPr id="18" name="C2-E11 line 16" descr="sci-ppt:o016"/>
+          <p:cNvCxnSpPr/>
+          <p:nvPr/>
+        </p:nvCxnSpPr>
+        <p:spPr>
+          <a:xfrm>
+            <a:off x="6126480" y="4114800"/>
+            <a:ext cx="5486400" cy="0"/>
+          </a:xfrm>
+          <a:prstGeom prst="line">
+            <a:avLst/>
+          </a:prstGeom>
+          <a:ln w="7620">
+            <a:solidFill>
+              <a:srgbClr val="2E4756"/>
+            </a:solidFill>
+          </a:ln>
+          <a:effectLst/>
+        </p:spPr>
+      </p:cxnSp>
+      <p:sp>
+        <p:nvSpPr>
+          <p:cNvPr id="19" name="C2-E11 text 17" descr="sci-ppt:o017"/>
+          <p:cNvSpPr txBox="1"/>
+          <p:nvPr/>
+        </p:nvSpPr>
+        <p:spPr>
+          <a:xfrm>
+            <a:off x="5257800" y="4032504"/>
+            <a:ext cx="777240" cy="208407"/>
+          </a:xfrm>
+          <a:prstGeom prst="rect">
+            <a:avLst/>
+          </a:prstGeom>
+          <a:noFill/>
+          <a:effectLst/>
+        </p:spPr>
+        <p:txBody>
+          <a:bodyPr wrap="none" lIns="18288" rIns="18288" tIns="18288" bIns="18288" anchor="t">
+            <a:spAutoFit/>
+          </a:bodyPr>
+          <a:lstStyle/>
+          <a:p>
+            <a:pPr algn="r">
+              <a:spcAft>
+                <a:spcPts val="0"/>
+              </a:spcAft>
+            </a:pPr>
+            <a:r>
+              <a:rPr sz="1050" b="0" i="0">
+                <a:solidFill>
+                  <a:srgbClr val="B4C7D2"/>
+                </a:solidFill>
+                <a:latin typeface="Arial"/>
+              </a:rPr>
+              <a:t>1e+04</a:t>
+            </a:r>
+          </a:p>
+        </p:txBody>
+      </p:sp>
+      <p:cxnSp>
+        <p:nvCxnSpPr>
+          <p:cNvPr id="20" name="C2-E11 line 18" descr="sci-ppt:o018"/>
+          <p:cNvCxnSpPr/>
+          <p:nvPr/>
+        </p:nvCxnSpPr>
+        <p:spPr>
+          <a:xfrm>
+            <a:off x="6062472" y="3200400"/>
+            <a:ext cx="64008" cy="0"/>
+          </a:xfrm>
+          <a:prstGeom prst="line">
+            <a:avLst/>
+          </a:prstGeom>
+          <a:ln w="12700">
+            <a:solidFill>
+              <a:srgbClr val="B4C7D2"/>
+            </a:solidFill>
+          </a:ln>
+          <a:effectLst/>
+        </p:spPr>
+      </p:cxnSp>
+      <p:cxnSp>
+        <p:nvCxnSpPr>
+          <p:cNvPr id="21" name="C2-E11 line 19" descr="sci-ppt:o019"/>
+          <p:cNvCxnSpPr/>
+          <p:nvPr/>
+        </p:nvCxnSpPr>
+        <p:spPr>
+          <a:xfrm>
+            <a:off x="6126480" y="3200400"/>
+            <a:ext cx="5486400" cy="0"/>
+          </a:xfrm>
+          <a:prstGeom prst="line">
+            <a:avLst/>
+          </a:prstGeom>
+          <a:ln w="7620">
+            <a:solidFill>
+              <a:srgbClr val="2E4756"/>
+            </a:solidFill>
+          </a:ln>
+          <a:effectLst/>
+        </p:spPr>
+      </p:cxnSp>
+      <p:sp>
+        <p:nvSpPr>
+          <p:cNvPr id="22" name="C2-E11 text 20" descr="sci-ppt:o020"/>
+          <p:cNvSpPr txBox="1"/>
+          <p:nvPr/>
+        </p:nvSpPr>
+        <p:spPr>
+          <a:xfrm>
+            <a:off x="5257800" y="3118104"/>
+            <a:ext cx="777240" cy="208407"/>
+          </a:xfrm>
+          <a:prstGeom prst="rect">
+            <a:avLst/>
+          </a:prstGeom>
+          <a:noFill/>
+          <a:effectLst/>
+        </p:spPr>
+        <p:txBody>
+          <a:bodyPr wrap="none" lIns="18288" rIns="18288" tIns="18288" bIns="18288" anchor="t">
+            <a:spAutoFit/>
+          </a:bodyPr>
+          <a:lstStyle/>
+          <a:p>
+            <a:pPr algn="r">
+              <a:spcAft>
+                <a:spcPts val="0"/>
+              </a:spcAft>
+            </a:pPr>
+            <a:r>
+              <a:rPr sz="1050" b="0" i="0">
+                <a:solidFill>
+                  <a:srgbClr val="B4C7D2"/>
+                </a:solidFill>
+                <a:latin typeface="Arial"/>
+              </a:rPr>
+              <a:t>1e+05</a:t>
+            </a:r>
+          </a:p>
+        </p:txBody>
+      </p:sp>
+      <p:cxnSp>
+        <p:nvCxnSpPr>
+          <p:cNvPr id="23" name="C2-E11 line 21" descr="sci-ppt:o021"/>
+          <p:cNvCxnSpPr/>
+          <p:nvPr/>
+        </p:nvCxnSpPr>
+        <p:spPr>
+          <a:xfrm>
+            <a:off x="6062472" y="2286000"/>
+            <a:ext cx="64008" cy="0"/>
+          </a:xfrm>
+          <a:prstGeom prst="line">
+            <a:avLst/>
+          </a:prstGeom>
+          <a:ln w="12700">
+            <a:solidFill>
+              <a:srgbClr val="B4C7D2"/>
+            </a:solidFill>
+          </a:ln>
+          <a:effectLst/>
+        </p:spPr>
+      </p:cxnSp>
+      <p:cxnSp>
+        <p:nvCxnSpPr>
+          <p:cNvPr id="24" name="C2-E11 line 22" descr="sci-ppt:o022"/>
+          <p:cNvCxnSpPr/>
+          <p:nvPr/>
+        </p:nvCxnSpPr>
+        <p:spPr>
+          <a:xfrm>
+            <a:off x="6126480" y="2286000"/>
+            <a:ext cx="5486400" cy="0"/>
+          </a:xfrm>
+          <a:prstGeom prst="line">
+            <a:avLst/>
+          </a:prstGeom>
+          <a:ln w="7620">
+            <a:solidFill>
+              <a:srgbClr val="2E4756"/>
+            </a:solidFill>
+          </a:ln>
+          <a:effectLst/>
+        </p:spPr>
+      </p:cxnSp>
+      <p:sp>
+        <p:nvSpPr>
+          <p:cNvPr id="25" name="C2-E11 text 23" descr="sci-ppt:o023"/>
+          <p:cNvSpPr txBox="1"/>
+          <p:nvPr/>
+        </p:nvSpPr>
+        <p:spPr>
+          <a:xfrm>
+            <a:off x="5257800" y="2203704"/>
+            <a:ext cx="777240" cy="208407"/>
+          </a:xfrm>
+          <a:prstGeom prst="rect">
+            <a:avLst/>
+          </a:prstGeom>
+          <a:noFill/>
+          <a:effectLst/>
+        </p:spPr>
+        <p:txBody>
+          <a:bodyPr wrap="none" lIns="18288" rIns="18288" tIns="18288" bIns="18288" anchor="t">
+            <a:spAutoFit/>
+          </a:bodyPr>
+          <a:lstStyle/>
+          <a:p>
+            <a:pPr algn="r">
+              <a:spcAft>
+                <a:spcPts val="0"/>
+              </a:spcAft>
+            </a:pPr>
+            <a:r>
+              <a:rPr sz="1050" b="0" i="0">
+                <a:solidFill>
+                  <a:srgbClr val="B4C7D2"/>
+                </a:solidFill>
+                <a:latin typeface="Arial"/>
+              </a:rPr>
+              <a:t>1e+06</a:t>
+            </a:r>
+          </a:p>
+        </p:txBody>
+      </p:sp>
+      <p:cxnSp>
+        <p:nvCxnSpPr>
+          <p:cNvPr id="26" name="C2-E11 line 24" descr="sci-ppt:o024"/>
+          <p:cNvCxnSpPr/>
+          <p:nvPr/>
+        </p:nvCxnSpPr>
+        <p:spPr>
+          <a:xfrm>
+            <a:off x="6062472" y="1371600"/>
+            <a:ext cx="64008" cy="0"/>
+          </a:xfrm>
+          <a:prstGeom prst="line">
+            <a:avLst/>
+          </a:prstGeom>
+          <a:ln w="12700">
+            <a:solidFill>
+              <a:srgbClr val="B4C7D2"/>
+            </a:solidFill>
+          </a:ln>
+          <a:effectLst/>
+        </p:spPr>
+      </p:cxnSp>
+      <p:cxnSp>
+        <p:nvCxnSpPr>
+          <p:cNvPr id="27" name="C2-E11 line 25" descr="sci-ppt:o025"/>
+          <p:cNvCxnSpPr/>
+          <p:nvPr/>
+        </p:nvCxnSpPr>
+        <p:spPr>
+          <a:xfrm>
+            <a:off x="6126480" y="1371600"/>
+            <a:ext cx="5486400" cy="0"/>
+          </a:xfrm>
+          <a:prstGeom prst="line">
+            <a:avLst/>
+          </a:prstGeom>
+          <a:ln w="7620">
+            <a:solidFill>
+              <a:srgbClr val="2E4756"/>
+            </a:solidFill>
+          </a:ln>
+          <a:effectLst/>
+        </p:spPr>
+      </p:cxnSp>
+      <p:sp>
+        <p:nvSpPr>
+          <p:cNvPr id="28" name="C2-E11 text 26" descr="sci-ppt:o026"/>
+          <p:cNvSpPr txBox="1"/>
+          <p:nvPr/>
+        </p:nvSpPr>
+        <p:spPr>
+          <a:xfrm>
+            <a:off x="5257800" y="1289304"/>
+            <a:ext cx="777240" cy="208407"/>
+          </a:xfrm>
+          <a:prstGeom prst="rect">
+            <a:avLst/>
+          </a:prstGeom>
+          <a:noFill/>
+          <a:effectLst/>
+        </p:spPr>
+        <p:txBody>
+          <a:bodyPr wrap="none" lIns="18288" rIns="18288" tIns="18288" bIns="18288" anchor="t">
+            <a:spAutoFit/>
+          </a:bodyPr>
+          <a:lstStyle/>
+          <a:p>
+            <a:pPr algn="r">
+              <a:spcAft>
+                <a:spcPts val="0"/>
+              </a:spcAft>
+            </a:pPr>
+            <a:r>
+              <a:rPr sz="1050" b="0" i="0">
+                <a:solidFill>
+                  <a:srgbClr val="B4C7D2"/>
+                </a:solidFill>
+                <a:latin typeface="Arial"/>
+              </a:rPr>
+              <a:t>1e+07</a:t>
+            </a:r>
+          </a:p>
+        </p:txBody>
+      </p:sp>
+      <p:sp>
+        <p:nvSpPr>
+          <p:cNvPr id="29" name="C2-E11 text 27" descr="sci-ppt:o027"/>
+          <p:cNvSpPr txBox="1"/>
+          <p:nvPr/>
+        </p:nvSpPr>
+        <p:spPr>
+          <a:xfrm>
+            <a:off x="6126480" y="5312664"/>
+            <a:ext cx="5486400" cy="231648"/>
+          </a:xfrm>
+          <a:prstGeom prst="rect">
+            <a:avLst/>
+          </a:prstGeom>
+          <a:noFill/>
+          <a:effectLst/>
+        </p:spPr>
+        <p:txBody>
+          <a:bodyPr wrap="none" lIns="18288" rIns="18288" tIns="18288" bIns="18288" anchor="t">
+            <a:spAutoFit/>
+          </a:bodyPr>
+          <a:lstStyle/>
+          <a:p>
+            <a:pPr algn="ctr">
+              <a:spcAft>
+                <a:spcPts val="0"/>
+              </a:spcAft>
+            </a:pPr>
+            <a:r>
+              <a:rPr sz="1200" b="0" i="0">
+                <a:solidFill>
+                  <a:srgbClr val="E7F0F3"/>
+                </a:solidFill>
+                <a:latin typeface="Arial"/>
+              </a:rPr>
+              <a:t>core radius a  (m)</a:t>
+            </a:r>
+          </a:p>
+        </p:txBody>
+      </p:sp>
+      <p:sp>
+        <p:nvSpPr>
+          <p:cNvPr id="30" name="C2-E11 text 28" descr="sci-ppt:o028"/>
+          <p:cNvSpPr txBox="1"/>
+          <p:nvPr/>
+        </p:nvSpPr>
+        <p:spPr>
+          <a:xfrm>
+            <a:off x="5577840" y="1024128"/>
+            <a:ext cx="5486400" cy="231648"/>
+          </a:xfrm>
+          <a:prstGeom prst="rect">
+            <a:avLst/>
+          </a:prstGeom>
+          <a:noFill/>
+          <a:effectLst/>
+        </p:spPr>
+        <p:txBody>
+          <a:bodyPr wrap="none" lIns="18288" rIns="18288" tIns="18288" bIns="18288" anchor="t">
+            <a:spAutoFit/>
+          </a:bodyPr>
+          <a:lstStyle/>
+          <a:p>
+            <a:pPr algn="l">
+              <a:spcAft>
+                <a:spcPts val="0"/>
+              </a:spcAft>
+            </a:pPr>
+            <a:r>
+              <a:rPr sz="1200" b="0" i="0">
+                <a:solidFill>
+                  <a:srgbClr val="E7F0F3"/>
+                </a:solidFill>
+                <a:latin typeface="Arial"/>
+              </a:rPr>
+              <a:t>2σ_pc / a  (Pa)</a:t>
+            </a:r>
+          </a:p>
+        </p:txBody>
+      </p:sp>
+      <p:sp>
+        <p:nvSpPr>
+          <p:cNvPr id="31" name="C2-E11 polygon 29" descr="sci-ppt:o029"/>
           <p:cNvSpPr/>
           <p:nvPr/>
         </p:nvSpPr>
         <p:spPr>
           <a:xfrm>
-            <a:off x="2072640" y="1402080"/>
-            <a:ext cx="2438400" cy="2438400"/>
+            <a:off x="6128363" y="2375556"/>
+            <a:ext cx="5264727" cy="2632363"/>
+          </a:xfrm>
+          <a:custGeom>
+            <a:avLst/>
+            <a:gdLst/>
+            <a:ahLst/>
+            <a:cxnLst/>
+            <a:rect l="l" t="t" r="r" b="b"/>
+            <a:pathLst>
+              <a:path w="5264727" h="2632363">
+                <a:moveTo>
+                  <a:pt x="0" y="0"/>
+                </a:moveTo>
+                <a:lnTo>
+                  <a:pt x="55418" y="27709"/>
+                </a:lnTo>
+                <a:lnTo>
+                  <a:pt x="110837" y="55418"/>
+                </a:lnTo>
+                <a:lnTo>
+                  <a:pt x="166255" y="83127"/>
+                </a:lnTo>
+                <a:lnTo>
+                  <a:pt x="221673" y="110836"/>
+                </a:lnTo>
+                <a:lnTo>
+                  <a:pt x="277091" y="138545"/>
+                </a:lnTo>
+                <a:lnTo>
+                  <a:pt x="332509" y="166254"/>
+                </a:lnTo>
+                <a:lnTo>
+                  <a:pt x="387927" y="193963"/>
+                </a:lnTo>
+                <a:lnTo>
+                  <a:pt x="443346" y="221673"/>
+                </a:lnTo>
+                <a:lnTo>
+                  <a:pt x="498764" y="249382"/>
+                </a:lnTo>
+                <a:lnTo>
+                  <a:pt x="554182" y="277091"/>
+                </a:lnTo>
+                <a:lnTo>
+                  <a:pt x="609600" y="304800"/>
+                </a:lnTo>
+                <a:lnTo>
+                  <a:pt x="665018" y="332509"/>
+                </a:lnTo>
+                <a:lnTo>
+                  <a:pt x="720437" y="360218"/>
+                </a:lnTo>
+                <a:lnTo>
+                  <a:pt x="775855" y="387927"/>
+                </a:lnTo>
+                <a:lnTo>
+                  <a:pt x="831273" y="415636"/>
+                </a:lnTo>
+                <a:lnTo>
+                  <a:pt x="886691" y="443345"/>
+                </a:lnTo>
+                <a:lnTo>
+                  <a:pt x="942109" y="471054"/>
+                </a:lnTo>
+                <a:lnTo>
+                  <a:pt x="997527" y="498763"/>
+                </a:lnTo>
+                <a:lnTo>
+                  <a:pt x="1052946" y="526473"/>
+                </a:lnTo>
+                <a:lnTo>
+                  <a:pt x="1108364" y="554182"/>
+                </a:lnTo>
+                <a:lnTo>
+                  <a:pt x="1163782" y="581891"/>
+                </a:lnTo>
+                <a:lnTo>
+                  <a:pt x="1219200" y="609600"/>
+                </a:lnTo>
+                <a:lnTo>
+                  <a:pt x="1274618" y="637309"/>
+                </a:lnTo>
+                <a:lnTo>
+                  <a:pt x="1330037" y="665018"/>
+                </a:lnTo>
+                <a:lnTo>
+                  <a:pt x="1385455" y="692727"/>
+                </a:lnTo>
+                <a:lnTo>
+                  <a:pt x="1440873" y="720436"/>
+                </a:lnTo>
+                <a:lnTo>
+                  <a:pt x="1496291" y="748145"/>
+                </a:lnTo>
+                <a:lnTo>
+                  <a:pt x="1551709" y="775854"/>
+                </a:lnTo>
+                <a:lnTo>
+                  <a:pt x="1607127" y="803563"/>
+                </a:lnTo>
+                <a:lnTo>
+                  <a:pt x="1662546" y="831273"/>
+                </a:lnTo>
+                <a:lnTo>
+                  <a:pt x="1717964" y="858982"/>
+                </a:lnTo>
+                <a:lnTo>
+                  <a:pt x="1773382" y="886691"/>
+                </a:lnTo>
+                <a:lnTo>
+                  <a:pt x="1828800" y="914400"/>
+                </a:lnTo>
+                <a:lnTo>
+                  <a:pt x="1884218" y="942109"/>
+                </a:lnTo>
+                <a:lnTo>
+                  <a:pt x="1939637" y="969818"/>
+                </a:lnTo>
+                <a:lnTo>
+                  <a:pt x="1995055" y="997527"/>
+                </a:lnTo>
+                <a:lnTo>
+                  <a:pt x="2050473" y="1025236"/>
+                </a:lnTo>
+                <a:lnTo>
+                  <a:pt x="2105891" y="1052945"/>
+                </a:lnTo>
+                <a:lnTo>
+                  <a:pt x="2161309" y="1080654"/>
+                </a:lnTo>
+                <a:lnTo>
+                  <a:pt x="2216727" y="1108363"/>
+                </a:lnTo>
+                <a:lnTo>
+                  <a:pt x="2272146" y="1136073"/>
+                </a:lnTo>
+                <a:lnTo>
+                  <a:pt x="2327564" y="1163782"/>
+                </a:lnTo>
+                <a:lnTo>
+                  <a:pt x="2382982" y="1191491"/>
+                </a:lnTo>
+                <a:lnTo>
+                  <a:pt x="2438400" y="1219200"/>
+                </a:lnTo>
+                <a:lnTo>
+                  <a:pt x="2493818" y="1246909"/>
+                </a:lnTo>
+                <a:lnTo>
+                  <a:pt x="2549237" y="1274618"/>
+                </a:lnTo>
+                <a:lnTo>
+                  <a:pt x="2604655" y="1302327"/>
+                </a:lnTo>
+                <a:lnTo>
+                  <a:pt x="2660073" y="1330036"/>
+                </a:lnTo>
+                <a:lnTo>
+                  <a:pt x="2715491" y="1357745"/>
+                </a:lnTo>
+                <a:lnTo>
+                  <a:pt x="2770909" y="1385454"/>
+                </a:lnTo>
+                <a:lnTo>
+                  <a:pt x="2826327" y="1413163"/>
+                </a:lnTo>
+                <a:lnTo>
+                  <a:pt x="2881746" y="1440873"/>
+                </a:lnTo>
+                <a:lnTo>
+                  <a:pt x="2937164" y="1468582"/>
+                </a:lnTo>
+                <a:lnTo>
+                  <a:pt x="2992582" y="1496291"/>
+                </a:lnTo>
+                <a:lnTo>
+                  <a:pt x="3048000" y="1524000"/>
+                </a:lnTo>
+                <a:lnTo>
+                  <a:pt x="3103418" y="1551709"/>
+                </a:lnTo>
+                <a:lnTo>
+                  <a:pt x="3158837" y="1579418"/>
+                </a:lnTo>
+                <a:lnTo>
+                  <a:pt x="3214255" y="1607127"/>
+                </a:lnTo>
+                <a:lnTo>
+                  <a:pt x="3269673" y="1634836"/>
+                </a:lnTo>
+                <a:lnTo>
+                  <a:pt x="3325091" y="1662545"/>
+                </a:lnTo>
+                <a:lnTo>
+                  <a:pt x="3380509" y="1690254"/>
+                </a:lnTo>
+                <a:lnTo>
+                  <a:pt x="3435927" y="1717963"/>
+                </a:lnTo>
+                <a:lnTo>
+                  <a:pt x="3491346" y="1745673"/>
+                </a:lnTo>
+                <a:lnTo>
+                  <a:pt x="3546764" y="1773382"/>
+                </a:lnTo>
+                <a:lnTo>
+                  <a:pt x="3602182" y="1801091"/>
+                </a:lnTo>
+                <a:lnTo>
+                  <a:pt x="3657600" y="1828800"/>
+                </a:lnTo>
+                <a:lnTo>
+                  <a:pt x="3713018" y="1856509"/>
+                </a:lnTo>
+                <a:lnTo>
+                  <a:pt x="3768437" y="1884218"/>
+                </a:lnTo>
+                <a:lnTo>
+                  <a:pt x="3823855" y="1911927"/>
+                </a:lnTo>
+                <a:lnTo>
+                  <a:pt x="3879273" y="1939636"/>
+                </a:lnTo>
+                <a:lnTo>
+                  <a:pt x="3934691" y="1967345"/>
+                </a:lnTo>
+                <a:lnTo>
+                  <a:pt x="3990109" y="1995054"/>
+                </a:lnTo>
+                <a:lnTo>
+                  <a:pt x="4045527" y="2022763"/>
+                </a:lnTo>
+                <a:lnTo>
+                  <a:pt x="4100946" y="2050473"/>
+                </a:lnTo>
+                <a:lnTo>
+                  <a:pt x="4156364" y="2078182"/>
+                </a:lnTo>
+                <a:lnTo>
+                  <a:pt x="4211782" y="2105891"/>
+                </a:lnTo>
+                <a:lnTo>
+                  <a:pt x="4267200" y="2133600"/>
+                </a:lnTo>
+                <a:lnTo>
+                  <a:pt x="4322618" y="2161309"/>
+                </a:lnTo>
+                <a:lnTo>
+                  <a:pt x="4378037" y="2189018"/>
+                </a:lnTo>
+                <a:lnTo>
+                  <a:pt x="4433455" y="2216727"/>
+                </a:lnTo>
+                <a:lnTo>
+                  <a:pt x="4488873" y="2244436"/>
+                </a:lnTo>
+                <a:lnTo>
+                  <a:pt x="4544291" y="2272145"/>
+                </a:lnTo>
+                <a:lnTo>
+                  <a:pt x="4599709" y="2299854"/>
+                </a:lnTo>
+                <a:lnTo>
+                  <a:pt x="4655127" y="2327563"/>
+                </a:lnTo>
+                <a:lnTo>
+                  <a:pt x="4710546" y="2355273"/>
+                </a:lnTo>
+                <a:lnTo>
+                  <a:pt x="4765964" y="2382982"/>
+                </a:lnTo>
+                <a:lnTo>
+                  <a:pt x="4821382" y="2410691"/>
+                </a:lnTo>
+                <a:lnTo>
+                  <a:pt x="4876800" y="2438400"/>
+                </a:lnTo>
+                <a:lnTo>
+                  <a:pt x="4932218" y="2466109"/>
+                </a:lnTo>
+                <a:lnTo>
+                  <a:pt x="4987637" y="2493818"/>
+                </a:lnTo>
+                <a:lnTo>
+                  <a:pt x="5043055" y="2521527"/>
+                </a:lnTo>
+                <a:lnTo>
+                  <a:pt x="5098473" y="2549236"/>
+                </a:lnTo>
+                <a:lnTo>
+                  <a:pt x="5153891" y="2576945"/>
+                </a:lnTo>
+                <a:lnTo>
+                  <a:pt x="5209309" y="2604654"/>
+                </a:lnTo>
+                <a:lnTo>
+                  <a:pt x="5264727" y="2632363"/>
+                </a:lnTo>
+              </a:path>
+            </a:pathLst>
+          </a:custGeom>
+          <a:noFill/>
+          <a:ln w="38100">
+            <a:solidFill>
+              <a:srgbClr val="8EDBD4"/>
+            </a:solidFill>
+          </a:ln>
+          <a:effectLst/>
+        </p:spPr>
+        <p:txBody>
+          <a:bodyPr rtlCol="0" anchor="ctr"/>
+          <a:lstStyle/>
+          <a:p>
+            <a:pPr algn="ctr"/>
+          </a:p>
+        </p:txBody>
+      </p:sp>
+      <p:sp>
+        <p:nvSpPr>
+          <p:cNvPr id="32" name="C2-E11 ellipse 30" descr="sci-ppt:o030"/>
+          <p:cNvSpPr/>
+          <p:nvPr/>
+        </p:nvSpPr>
+        <p:spPr>
+          <a:xfrm>
+            <a:off x="9710928" y="4130262"/>
+            <a:ext cx="146304" cy="146304"/>
           </a:xfrm>
           <a:prstGeom prst="ellipse">
+            <a:avLst/>
+          </a:prstGeom>
+          <a:solidFill>
+            <a:srgbClr val="F2B880"/>
+          </a:solidFill>
+          <a:ln w="12700">
+            <a:solidFill>
+              <a:srgbClr val="F2B880"/>
+            </a:solidFill>
+          </a:ln>
+          <a:effectLst/>
+        </p:spPr>
+        <p:txBody>
+          <a:bodyPr rtlCol="0" anchor="ctr"/>
+          <a:lstStyle/>
+          <a:p>
+            <a:pPr algn="ctr"/>
+          </a:p>
+        </p:txBody>
+      </p:sp>
+      <p:sp>
+        <p:nvSpPr>
+          <p:cNvPr id="33" name="C2-E11 text 31" descr="sci-ppt:o031"/>
+          <p:cNvSpPr txBox="1"/>
+          <p:nvPr/>
+        </p:nvSpPr>
+        <p:spPr>
+          <a:xfrm>
+            <a:off x="9893807" y="3746214"/>
+            <a:ext cx="1737360" cy="239395"/>
+          </a:xfrm>
+          <a:prstGeom prst="rect">
+            <a:avLst/>
+          </a:prstGeom>
+          <a:noFill/>
+          <a:effectLst/>
+        </p:spPr>
+        <p:txBody>
+          <a:bodyPr wrap="none" lIns="18288" rIns="18288" tIns="18288" bIns="18288" anchor="t">
+            <a:spAutoFit/>
+          </a:bodyPr>
+          <a:lstStyle/>
+          <a:p>
+            <a:pPr algn="l">
+              <a:spcAft>
+                <a:spcPts val="0"/>
+              </a:spcAft>
+            </a:pPr>
+            <a:r>
+              <a:rPr sz="1250" b="0" i="0">
+                <a:solidFill>
+                  <a:srgbClr val="F2B880"/>
+                </a:solidFill>
+                <a:latin typeface="Arial"/>
+              </a:rPr>
+              <a:t>5 µm: 8 kPa</a:t>
+            </a:r>
+          </a:p>
+        </p:txBody>
+      </p:sp>
+      <p:sp>
+        <p:nvSpPr>
+          <p:cNvPr id="34" name="C2-E11 ellipse 32" descr="sci-ppt:o032"/>
+          <p:cNvSpPr/>
+          <p:nvPr/>
+        </p:nvSpPr>
+        <p:spPr>
+          <a:xfrm>
+            <a:off x="6603851" y="2576724"/>
+            <a:ext cx="146304" cy="146304"/>
+          </a:xfrm>
+          <a:prstGeom prst="ellipse">
+            <a:avLst/>
+          </a:prstGeom>
+          <a:solidFill>
+            <a:srgbClr val="F28BA0"/>
+          </a:solidFill>
+          <a:ln w="12700">
+            <a:solidFill>
+              <a:srgbClr val="F28BA0"/>
+            </a:solidFill>
+          </a:ln>
+          <a:effectLst/>
+        </p:spPr>
+        <p:txBody>
+          <a:bodyPr rtlCol="0" anchor="ctr"/>
+          <a:lstStyle/>
+          <a:p>
+            <a:pPr algn="ctr"/>
+          </a:p>
+        </p:txBody>
+      </p:sp>
+      <p:sp>
+        <p:nvSpPr>
+          <p:cNvPr id="35" name="C2-E11 text 33" descr="sci-ppt:o033"/>
+          <p:cNvSpPr txBox="1"/>
+          <p:nvPr/>
+        </p:nvSpPr>
+        <p:spPr>
+          <a:xfrm>
+            <a:off x="6786731" y="2558436"/>
+            <a:ext cx="2011680" cy="239395"/>
+          </a:xfrm>
+          <a:prstGeom prst="rect">
+            <a:avLst/>
+          </a:prstGeom>
+          <a:noFill/>
+          <a:effectLst/>
+        </p:spPr>
+        <p:txBody>
+          <a:bodyPr wrap="none" lIns="18288" rIns="18288" tIns="18288" bIns="18288" anchor="t">
+            <a:spAutoFit/>
+          </a:bodyPr>
+          <a:lstStyle/>
+          <a:p>
+            <a:pPr algn="l">
+              <a:spcAft>
+                <a:spcPts val="0"/>
+              </a:spcAft>
+            </a:pPr>
+            <a:r>
+              <a:rPr sz="1250" b="0" i="0">
+                <a:solidFill>
+                  <a:srgbClr val="F28BA0"/>
+                </a:solidFill>
+                <a:latin typeface="Arial"/>
+              </a:rPr>
+              <a:t>0.1 µm: 400 kPa</a:t>
+            </a:r>
+          </a:p>
+        </p:txBody>
+      </p:sp>
+      <p:sp>
+        <p:nvSpPr>
+          <p:cNvPr id="36" name="C2-E11 round_rect 34" descr="sci-ppt:o034"/>
+          <p:cNvSpPr/>
+          <p:nvPr/>
+        </p:nvSpPr>
+        <p:spPr>
+          <a:xfrm>
+            <a:off x="365760" y="914400"/>
+            <a:ext cx="4937760" cy="4846320"/>
+          </a:xfrm>
+          <a:prstGeom prst="roundRect">
             <a:avLst/>
           </a:prstGeom>
           <a:solidFill>
             <a:srgbClr val="213E4B"/>
           </a:solidFill>
-          <a:ln w="21590">
+          <a:ln w="20320">
             <a:solidFill>
-              <a:srgbClr val="B4C7D2"/>
+              <a:srgbClr val="8EDBD4"/>
             </a:solidFill>
           </a:ln>
           <a:effectLst/>
@@ -3168,40 +4434,16 @@
           </a:p>
         </p:txBody>
       </p:sp>
-      <p:cxnSp>
-        <p:nvCxnSpPr>
-          <p:cNvPr id="4" name="arrow3" descr="sci-ppt:C2-E11-003"/>
-          <p:cNvCxnSpPr/>
-          <p:nvPr/>
-        </p:nvCxnSpPr>
-        <p:spPr>
-          <a:xfrm>
-            <a:off x="3291840" y="2621280"/>
-            <a:ext cx="1219200" cy="0"/>
-          </a:xfrm>
-          <a:prstGeom prst="line">
-            <a:avLst/>
-          </a:prstGeom>
-          <a:ln w="25400">
-            <a:solidFill>
-              <a:srgbClr val="8EDBD4"/>
-            </a:solidFill>
-            <a:headEnd type="none" w="med" len="med"/>
-            <a:tailEnd type="triangle" w="med" len="med"/>
-          </a:ln>
-          <a:effectLst/>
-        </p:spPr>
-      </p:cxnSp>
-      <p:sp>
-        <p:nvSpPr>
-          <p:cNvPr id="5" name="text4" descr="sci-ppt:C2-E11-004"/>
+      <p:sp>
+        <p:nvSpPr>
+          <p:cNvPr id="37" name="C2-E11 text 35" descr="sci-ppt:o035"/>
           <p:cNvSpPr txBox="1"/>
           <p:nvPr/>
         </p:nvSpPr>
         <p:spPr>
           <a:xfrm>
-            <a:off x="3474720" y="2133600"/>
-            <a:ext cx="1584960" cy="396849"/>
+            <a:off x="475488" y="969264"/>
+            <a:ext cx="4718304" cy="247142"/>
           </a:xfrm>
           <a:prstGeom prst="rect">
             <a:avLst/>
@@ -3210,7 +4452,7 @@
           <a:effectLst/>
         </p:spPr>
         <p:txBody>
-          <a:bodyPr wrap="none" lIns="27432" rIns="27432" tIns="18288" bIns="18288" anchor="ctr">
+          <a:bodyPr wrap="none" lIns="18288" rIns="18288" tIns="18288" bIns="18288" anchor="t">
             <a:spAutoFit/>
           </a:bodyPr>
           <a:lstStyle/>
@@ -3221,27 +4463,147 @@
               </a:spcAft>
             </a:pPr>
             <a:r>
-              <a:rPr sz="2016" b="0" i="0">
+              <a:rPr sz="1300" b="1" i="0">
+                <a:solidFill>
+                  <a:srgbClr val="8EDBD4"/>
+                </a:solidFill>
+                <a:latin typeface="Arial"/>
+              </a:rPr>
+              <a:t>Smaller inclusion, larger capillary pressure</a:t>
+            </a:r>
+          </a:p>
+        </p:txBody>
+      </p:sp>
+      <p:sp>
+        <p:nvSpPr>
+          <p:cNvPr id="38" name="C2-E11 ellipse 36" descr="sci-ppt:o036"/>
+          <p:cNvSpPr/>
+          <p:nvPr/>
+        </p:nvSpPr>
+        <p:spPr>
+          <a:xfrm>
+            <a:off x="685800" y="1874520"/>
+            <a:ext cx="2103120" cy="2103120"/>
+          </a:xfrm>
+          <a:prstGeom prst="ellipse">
+            <a:avLst/>
+          </a:prstGeom>
+          <a:solidFill>
+            <a:srgbClr val="1E4A5A"/>
+          </a:solidFill>
+          <a:ln w="27940">
+            <a:solidFill>
+              <a:srgbClr val="8EDBD4"/>
+            </a:solidFill>
+          </a:ln>
+          <a:effectLst/>
+        </p:spPr>
+        <p:txBody>
+          <a:bodyPr rtlCol="0" anchor="ctr"/>
+          <a:lstStyle/>
+          <a:p>
+            <a:pPr algn="ctr"/>
+          </a:p>
+        </p:txBody>
+      </p:sp>
+      <p:sp>
+        <p:nvSpPr>
+          <p:cNvPr id="39" name="C2-E11 text 37" descr="sci-ppt:o037"/>
+          <p:cNvSpPr txBox="1"/>
+          <p:nvPr/>
+        </p:nvSpPr>
+        <p:spPr>
+          <a:xfrm>
+            <a:off x="1005840" y="2743200"/>
+            <a:ext cx="1463040" cy="433070"/>
+          </a:xfrm>
+          <a:prstGeom prst="rect">
+            <a:avLst/>
+          </a:prstGeom>
+          <a:noFill/>
+          <a:effectLst/>
+        </p:spPr>
+        <p:txBody>
+          <a:bodyPr wrap="none" lIns="18288" rIns="18288" tIns="18288" bIns="18288" anchor="t">
+            <a:spAutoFit/>
+          </a:bodyPr>
+          <a:lstStyle/>
+          <a:p>
+            <a:pPr algn="ctr">
+              <a:spcAft>
+                <a:spcPts val="0"/>
+              </a:spcAft>
+            </a:pPr>
+            <a:r>
+              <a:rPr sz="1250" b="1" i="0">
                 <a:solidFill>
                   <a:srgbClr val="E7F0F3"/>
                 </a:solidFill>
                 <a:latin typeface="Arial"/>
               </a:rPr>
-              <a:t>a</a:t>
-            </a:r>
-          </a:p>
-        </p:txBody>
-      </p:sp>
-      <p:sp>
-        <p:nvSpPr>
-          <p:cNvPr id="6" name="text5" descr="sci-ppt:C2-E11-005"/>
+              <a:t>a = 5 µm</a:t>
+            </a:r>
+          </a:p>
+          <a:p>
+            <a:pPr algn="ctr">
+              <a:spcAft>
+                <a:spcPts val="0"/>
+              </a:spcAft>
+            </a:pPr>
+            <a:r>
+              <a:rPr sz="1250" b="1" i="0">
+                <a:solidFill>
+                  <a:srgbClr val="E7F0F3"/>
+                </a:solidFill>
+                <a:latin typeface="Arial"/>
+              </a:rPr>
+              <a:t>8 kPa</a:t>
+            </a:r>
+          </a:p>
+        </p:txBody>
+      </p:sp>
+      <p:sp>
+        <p:nvSpPr>
+          <p:cNvPr id="40" name="C2-E11 ellipse 38" descr="sci-ppt:o038"/>
+          <p:cNvSpPr/>
+          <p:nvPr/>
+        </p:nvSpPr>
+        <p:spPr>
+          <a:xfrm>
+            <a:off x="3703320" y="2606040"/>
+            <a:ext cx="640080" cy="640080"/>
+          </a:xfrm>
+          <a:prstGeom prst="ellipse">
+            <a:avLst/>
+          </a:prstGeom>
+          <a:solidFill>
+            <a:srgbClr val="1E4A5A"/>
+          </a:solidFill>
+          <a:ln w="27940">
+            <a:solidFill>
+              <a:srgbClr val="F28BA0"/>
+            </a:solidFill>
+          </a:ln>
+          <a:effectLst/>
+        </p:spPr>
+        <p:txBody>
+          <a:bodyPr rtlCol="0" anchor="ctr"/>
+          <a:lstStyle/>
+          <a:p>
+            <a:pPr algn="ctr"/>
+          </a:p>
+        </p:txBody>
+      </p:sp>
+      <p:sp>
+        <p:nvSpPr>
+          <p:cNvPr id="41" name="C2-E11 text 39" descr="sci-ppt:o039"/>
           <p:cNvSpPr txBox="1"/>
           <p:nvPr/>
         </p:nvSpPr>
         <p:spPr>
           <a:xfrm>
-            <a:off x="2682240" y="2804160"/>
-            <a:ext cx="2194560" cy="377952"/>
+            <a:off x="3474720" y="3383280"/>
+            <a:ext cx="1280160" cy="402081"/>
           </a:xfrm>
           <a:prstGeom prst="rect">
             <a:avLst/>
@@ -3250,7 +4612,63 @@
           <a:effectLst/>
         </p:spPr>
         <p:txBody>
-          <a:bodyPr wrap="none" lIns="27432" rIns="27432" tIns="18288" bIns="18288" anchor="ctr">
+          <a:bodyPr wrap="none" lIns="18288" rIns="18288" tIns="18288" bIns="18288" anchor="t">
+            <a:spAutoFit/>
+          </a:bodyPr>
+          <a:lstStyle/>
+          <a:p>
+            <a:pPr algn="ctr">
+              <a:spcAft>
+                <a:spcPts val="0"/>
+              </a:spcAft>
+            </a:pPr>
+            <a:r>
+              <a:rPr sz="1150" b="1" i="0">
+                <a:solidFill>
+                  <a:srgbClr val="F28BA0"/>
+                </a:solidFill>
+                <a:latin typeface="Arial"/>
+              </a:rPr>
+              <a:t>a = 0.1 µm</a:t>
+            </a:r>
+          </a:p>
+          <a:p>
+            <a:pPr algn="ctr">
+              <a:spcAft>
+                <a:spcPts val="0"/>
+              </a:spcAft>
+            </a:pPr>
+            <a:r>
+              <a:rPr sz="1150" b="1" i="0">
+                <a:solidFill>
+                  <a:srgbClr val="F28BA0"/>
+                </a:solidFill>
+                <a:latin typeface="Arial"/>
+              </a:rPr>
+              <a:t>400 kPa</a:t>
+            </a:r>
+          </a:p>
+        </p:txBody>
+      </p:sp>
+      <p:sp>
+        <p:nvSpPr>
+          <p:cNvPr id="42" name="C2-E11 text 40" descr="sci-ppt:o040"/>
+          <p:cNvSpPr txBox="1"/>
+          <p:nvPr/>
+        </p:nvSpPr>
+        <p:spPr>
+          <a:xfrm>
+            <a:off x="502920" y="4160520"/>
+            <a:ext cx="4572000" cy="254889"/>
+          </a:xfrm>
+          <a:prstGeom prst="rect">
+            <a:avLst/>
+          </a:prstGeom>
+          <a:noFill/>
+          <a:effectLst/>
+        </p:spPr>
+        <p:txBody>
+          <a:bodyPr wrap="none" lIns="18288" rIns="18288" tIns="18288" bIns="18288" anchor="t">
             <a:spAutoFit/>
           </a:bodyPr>
           <a:lstStyle/>
@@ -3261,27 +4679,83 @@
               </a:spcAft>
             </a:pPr>
             <a:r>
-              <a:rPr sz="1920" b="0" i="0">
+              <a:rPr sz="1350" b="1" i="0">
+                <a:solidFill>
+                  <a:srgbClr val="F2B880"/>
+                </a:solidFill>
+                <a:latin typeface="Arial"/>
+              </a:rPr>
+              <a:t>p_d ≃ p_c + 2σ_pc/a + Πₛₕₑₗₗ</a:t>
+            </a:r>
+          </a:p>
+        </p:txBody>
+      </p:sp>
+      <p:sp>
+        <p:nvSpPr>
+          <p:cNvPr id="43" name="C2-E11 text 41" descr="sci-ppt:o041"/>
+          <p:cNvSpPr txBox="1"/>
+          <p:nvPr/>
+        </p:nvSpPr>
+        <p:spPr>
+          <a:xfrm>
+            <a:off x="502920" y="4572000"/>
+            <a:ext cx="4572000" cy="417576"/>
+          </a:xfrm>
+          <a:prstGeom prst="rect">
+            <a:avLst/>
+          </a:prstGeom>
+          <a:noFill/>
+          <a:effectLst/>
+        </p:spPr>
+        <p:txBody>
+          <a:bodyPr wrap="none" lIns="18288" rIns="18288" tIns="18288" bIns="18288" anchor="t">
+            <a:spAutoFit/>
+          </a:bodyPr>
+          <a:lstStyle/>
+          <a:p>
+            <a:pPr algn="l">
+              <a:spcAft>
+                <a:spcPts val="0"/>
+              </a:spcAft>
+            </a:pPr>
+            <a:r>
+              <a:rPr sz="1200" b="0" i="0">
                 <a:solidFill>
                   <a:srgbClr val="E7F0F3"/>
                 </a:solidFill>
                 <a:latin typeface="Arial"/>
               </a:rPr>
-              <a:t>PFC liquid</a:t>
-            </a:r>
-          </a:p>
-        </p:txBody>
-      </p:sp>
-      <p:sp>
-        <p:nvSpPr>
-          <p:cNvPr id="7" name="text6" descr="sci-ppt:C2-E11-006"/>
+              <a:t>σ_pc = 0.020 N/m (teaching value); the shell term is</a:t>
+            </a:r>
+          </a:p>
+          <a:p>
+            <a:pPr algn="l">
+              <a:spcAft>
+                <a:spcPts val="0"/>
+              </a:spcAft>
+            </a:pPr>
+            <a:r>
+              <a:rPr sz="1200" b="0" i="0">
+                <a:solidFill>
+                  <a:srgbClr val="E7F0F3"/>
+                </a:solidFill>
+                <a:latin typeface="Arial"/>
+              </a:rPr>
+              <a:t>added separately.</a:t>
+            </a:r>
+          </a:p>
+        </p:txBody>
+      </p:sp>
+      <p:sp>
+        <p:nvSpPr>
+          <p:cNvPr id="44" name="C2-E11 text 42" descr="sci-ppt:o042"/>
           <p:cNvSpPr txBox="1"/>
           <p:nvPr/>
         </p:nvSpPr>
         <p:spPr>
           <a:xfrm>
-            <a:off x="5242560" y="1524000"/>
-            <a:ext cx="4876800" cy="415747"/>
+            <a:off x="5577840" y="5733288"/>
+            <a:ext cx="6217920" cy="433070"/>
           </a:xfrm>
           <a:prstGeom prst="rect">
             <a:avLst/>
@@ -3290,7 +4764,7 @@
           <a:effectLst/>
         </p:spPr>
         <p:txBody>
-          <a:bodyPr wrap="none" lIns="27432" rIns="27432" tIns="18288" bIns="18288" anchor="ctr">
+          <a:bodyPr wrap="none" lIns="18288" rIns="18288" tIns="18288" bIns="18288" anchor="t">
             <a:spAutoFit/>
           </a:bodyPr>
           <a:lstStyle/>
@@ -3301,27 +4775,43 @@
               </a:spcAft>
             </a:pPr>
             <a:r>
-              <a:rPr sz="2111" b="0" i="0">
+              <a:rPr sz="1250" b="0" i="0">
                 <a:solidFill>
                   <a:srgbClr val="E7F0F3"/>
                 </a:solidFill>
                 <a:latin typeface="Arial"/>
               </a:rPr>
-              <a:t>Aqueous carrier</a:t>
-            </a:r>
-          </a:p>
-        </p:txBody>
-      </p:sp>
-      <p:sp>
-        <p:nvSpPr>
-          <p:cNvPr id="8" name="text7" descr="sci-ppt:C2-E11-007"/>
+              <a:t>Same tension, 50 times smaller radius: capillary pressure 50 times larger</a:t>
+            </a:r>
+          </a:p>
+          <a:p>
+            <a:pPr algn="l">
+              <a:spcAft>
+                <a:spcPts val="0"/>
+              </a:spcAft>
+            </a:pPr>
+            <a:r>
+              <a:rPr sz="1250" b="0" i="0">
+                <a:solidFill>
+                  <a:srgbClr val="E7F0F3"/>
+                </a:solidFill>
+                <a:latin typeface="Arial"/>
+              </a:rPr>
+              <a:t>(2σ/a is inversely proportional to a).</a:t>
+            </a:r>
+          </a:p>
+        </p:txBody>
+      </p:sp>
+      <p:sp>
+        <p:nvSpPr>
+          <p:cNvPr id="45" name="C2-E11 text 43" descr="sci-ppt:o043"/>
           <p:cNvSpPr txBox="1"/>
           <p:nvPr/>
         </p:nvSpPr>
         <p:spPr>
           <a:xfrm>
-            <a:off x="5242560" y="1987296"/>
-            <a:ext cx="5852160" cy="359054"/>
+            <a:off x="320040" y="6510528"/>
+            <a:ext cx="11521440" cy="200660"/>
           </a:xfrm>
           <a:prstGeom prst="rect">
             <a:avLst/>
@@ -3330,7 +4820,7 @@
           <a:effectLst/>
         </p:spPr>
         <p:txBody>
-          <a:bodyPr wrap="none" lIns="27432" rIns="27432" tIns="18288" bIns="18288" anchor="ctr">
+          <a:bodyPr wrap="none" lIns="18288" rIns="18288" tIns="18288" bIns="18288" anchor="t">
             <a:spAutoFit/>
           </a:bodyPr>
           <a:lstStyle/>
@@ -3341,373 +4831,13 @@
               </a:spcAft>
             </a:pPr>
             <a:r>
-              <a:rPr sz="1823" b="0" i="0">
-                <a:solidFill>
-                  <a:srgbClr val="E7F0F3"/>
-                </a:solidFill>
-                <a:latin typeface="Arial"/>
-              </a:rPr>
-              <a:t>p_c; interface: σ_pc, shell</a:t>
-            </a:r>
-          </a:p>
-        </p:txBody>
-      </p:sp>
-      <p:sp>
-        <p:nvSpPr>
-          <p:cNvPr id="9" name="text8" descr="sci-ppt:C2-E11-008"/>
-          <p:cNvSpPr txBox="1"/>
-          <p:nvPr/>
-        </p:nvSpPr>
-        <p:spPr>
-          <a:xfrm>
-            <a:off x="1219200" y="4206240"/>
-            <a:ext cx="9753600" cy="340156"/>
-          </a:xfrm>
-          <a:prstGeom prst="rect">
-            <a:avLst/>
-          </a:prstGeom>
-          <a:noFill/>
-          <a:effectLst/>
-        </p:spPr>
-        <p:txBody>
-          <a:bodyPr wrap="none" lIns="27432" rIns="27432" tIns="18288" bIns="18288" anchor="ctr">
-            <a:spAutoFit/>
-          </a:bodyPr>
-          <a:lstStyle/>
-          <a:p>
-            <a:pPr algn="l">
-              <a:spcAft>
-                <a:spcPts val="0"/>
-              </a:spcAft>
-            </a:pPr>
-            <a:r>
-              <a:rPr sz="1728" b="0" i="0">
-                <a:solidFill>
-                  <a:srgbClr val="E7F0F3"/>
-                </a:solidFill>
-                <a:latin typeface="Arial"/>
-              </a:rPr>
-              <a:t>Finite liquid core: a differs from subsequent bubble radius R.</a:t>
-            </a:r>
-          </a:p>
-        </p:txBody>
-      </p:sp>
-      <p:sp>
-        <p:nvSpPr>
-          <p:cNvPr id="10" name="text9" descr="sci-ppt:C2-E11-009"/>
-          <p:cNvSpPr txBox="1"/>
-          <p:nvPr/>
-        </p:nvSpPr>
-        <p:spPr>
-          <a:xfrm>
-            <a:off x="365760" y="4974336"/>
-            <a:ext cx="5547360" cy="321259"/>
-          </a:xfrm>
-          <a:prstGeom prst="rect">
-            <a:avLst/>
-          </a:prstGeom>
-          <a:noFill/>
-          <a:effectLst/>
-        </p:spPr>
-        <p:txBody>
-          <a:bodyPr wrap="none" lIns="27432" rIns="27432" tIns="18288" bIns="18288" anchor="ctr">
-            <a:spAutoFit/>
-          </a:bodyPr>
-          <a:lstStyle/>
-          <a:p>
-            <a:pPr algn="l">
-              <a:spcAft>
-                <a:spcPts val="0"/>
-              </a:spcAft>
-            </a:pPr>
-            <a:r>
-              <a:rPr sz="1632" b="0" i="0">
-                <a:solidFill>
-                  <a:srgbClr val="E7F0F3"/>
-                </a:solidFill>
-                <a:latin typeface="Arial"/>
-              </a:rPr>
-              <a:t>a: PFC-core radius</a:t>
-            </a:r>
-          </a:p>
-        </p:txBody>
-      </p:sp>
-      <p:sp>
-        <p:nvSpPr>
-          <p:cNvPr id="11" name="text10" descr="sci-ppt:C2-E11-010"/>
-          <p:cNvSpPr txBox="1"/>
-          <p:nvPr/>
-        </p:nvSpPr>
-        <p:spPr>
-          <a:xfrm>
-            <a:off x="365760" y="5266944"/>
-            <a:ext cx="5547360" cy="321259"/>
-          </a:xfrm>
-          <a:prstGeom prst="rect">
-            <a:avLst/>
-          </a:prstGeom>
-          <a:noFill/>
-          <a:effectLst/>
-        </p:spPr>
-        <p:txBody>
-          <a:bodyPr wrap="none" lIns="27432" rIns="27432" tIns="18288" bIns="18288" anchor="ctr">
-            <a:spAutoFit/>
-          </a:bodyPr>
-          <a:lstStyle/>
-          <a:p>
-            <a:pPr algn="l">
-              <a:spcAft>
-                <a:spcPts val="0"/>
-              </a:spcAft>
-            </a:pPr>
-            <a:r>
-              <a:rPr sz="1632" b="0" i="0">
-                <a:solidFill>
-                  <a:srgbClr val="E7F0F3"/>
-                </a:solidFill>
-                <a:latin typeface="Arial"/>
-              </a:rPr>
-              <a:t>p_c: aqueous carrier outside</a:t>
-            </a:r>
-          </a:p>
-        </p:txBody>
-      </p:sp>
-      <p:sp>
-        <p:nvSpPr>
-          <p:cNvPr id="12" name="text11" descr="sci-ppt:C2-E11-011"/>
-          <p:cNvSpPr txBox="1"/>
-          <p:nvPr/>
-        </p:nvSpPr>
-        <p:spPr>
-          <a:xfrm>
-            <a:off x="365760" y="5559552"/>
-            <a:ext cx="5547360" cy="321259"/>
-          </a:xfrm>
-          <a:prstGeom prst="rect">
-            <a:avLst/>
-          </a:prstGeom>
-          <a:noFill/>
-          <a:effectLst/>
-        </p:spPr>
-        <p:txBody>
-          <a:bodyPr wrap="none" lIns="27432" rIns="27432" tIns="18288" bIns="18288" anchor="ctr">
-            <a:spAutoFit/>
-          </a:bodyPr>
-          <a:lstStyle/>
-          <a:p>
-            <a:pPr algn="l">
-              <a:spcAft>
-                <a:spcPts val="0"/>
-              </a:spcAft>
-            </a:pPr>
-            <a:r>
-              <a:rPr sz="1632" b="0" i="0">
-                <a:solidFill>
-                  <a:srgbClr val="E7F0F3"/>
-                </a:solidFill>
-                <a:latin typeface="Arial"/>
-              </a:rPr>
-              <a:t>Π_shell: shell pressure</a:t>
-            </a:r>
-          </a:p>
-        </p:txBody>
-      </p:sp>
-      <p:sp>
-        <p:nvSpPr>
-          <p:cNvPr id="13" name="text12" descr="sci-ppt:C2-E11-012"/>
-          <p:cNvSpPr txBox="1"/>
-          <p:nvPr/>
-        </p:nvSpPr>
-        <p:spPr>
-          <a:xfrm>
-            <a:off x="6156960" y="4974336"/>
-            <a:ext cx="5547360" cy="321259"/>
-          </a:xfrm>
-          <a:prstGeom prst="rect">
-            <a:avLst/>
-          </a:prstGeom>
-          <a:noFill/>
-          <a:effectLst/>
-        </p:spPr>
-        <p:txBody>
-          <a:bodyPr wrap="none" lIns="27432" rIns="27432" tIns="18288" bIns="18288" anchor="ctr">
-            <a:spAutoFit/>
-          </a:bodyPr>
-          <a:lstStyle/>
-          <a:p>
-            <a:pPr algn="l">
-              <a:spcAft>
-                <a:spcPts val="0"/>
-              </a:spcAft>
-            </a:pPr>
-            <a:r>
-              <a:rPr sz="1632" b="0" i="0">
-                <a:solidFill>
-                  <a:srgbClr val="E7F0F3"/>
-                </a:solidFill>
-                <a:latin typeface="Arial"/>
-              </a:rPr>
-              <a:t>p_d: inside core</a:t>
-            </a:r>
-          </a:p>
-        </p:txBody>
-      </p:sp>
-      <p:sp>
-        <p:nvSpPr>
-          <p:cNvPr id="14" name="text13" descr="sci-ppt:C2-E11-013"/>
-          <p:cNvSpPr txBox="1"/>
-          <p:nvPr/>
-        </p:nvSpPr>
-        <p:spPr>
-          <a:xfrm>
-            <a:off x="6156960" y="5266944"/>
-            <a:ext cx="5547360" cy="321259"/>
-          </a:xfrm>
-          <a:prstGeom prst="rect">
-            <a:avLst/>
-          </a:prstGeom>
-          <a:noFill/>
-          <a:effectLst/>
-        </p:spPr>
-        <p:txBody>
-          <a:bodyPr wrap="none" lIns="27432" rIns="27432" tIns="18288" bIns="18288" anchor="ctr">
-            <a:spAutoFit/>
-          </a:bodyPr>
-          <a:lstStyle/>
-          <a:p>
-            <a:pPr algn="l">
-              <a:spcAft>
-                <a:spcPts val="0"/>
-              </a:spcAft>
-            </a:pPr>
-            <a:r>
-              <a:rPr sz="1632" b="0" i="0">
-                <a:solidFill>
-                  <a:srgbClr val="E7F0F3"/>
-                </a:solidFill>
-                <a:latin typeface="Arial"/>
-              </a:rPr>
-              <a:t>σ_pc: PFC–carrier interface</a:t>
-            </a:r>
-          </a:p>
-        </p:txBody>
-      </p:sp>
-      <p:sp>
-        <p:nvSpPr>
-          <p:cNvPr id="15" name="text14" descr="sci-ppt:C2-E11-014"/>
-          <p:cNvSpPr txBox="1"/>
-          <p:nvPr/>
-        </p:nvSpPr>
-        <p:spPr>
-          <a:xfrm>
-            <a:off x="6156960" y="5559552"/>
-            <a:ext cx="5547360" cy="321259"/>
-          </a:xfrm>
-          <a:prstGeom prst="rect">
-            <a:avLst/>
-          </a:prstGeom>
-          <a:noFill/>
-          <a:effectLst/>
-        </p:spPr>
-        <p:txBody>
-          <a:bodyPr wrap="none" lIns="27432" rIns="27432" tIns="18288" bIns="18288" anchor="ctr">
-            <a:spAutoFit/>
-          </a:bodyPr>
-          <a:lstStyle/>
-          <a:p>
-            <a:pPr algn="l">
-              <a:spcAft>
-                <a:spcPts val="0"/>
-              </a:spcAft>
-            </a:pPr>
-            <a:r>
-              <a:rPr sz="1632" b="0" i="0">
-                <a:solidFill>
-                  <a:srgbClr val="E7F0F3"/>
-                </a:solidFill>
-                <a:latin typeface="Arial"/>
-              </a:rPr>
-              <a:t>8 kPa at 5 μm; 400 kPa at 100 nm</a:t>
-            </a:r>
-          </a:p>
-        </p:txBody>
-      </p:sp>
-      <p:sp>
-        <p:nvSpPr>
-          <p:cNvPr id="16" name="text15" descr="sci-ppt:C2-E11-015"/>
-          <p:cNvSpPr txBox="1"/>
-          <p:nvPr/>
-        </p:nvSpPr>
-        <p:spPr>
-          <a:xfrm>
-            <a:off x="365760" y="6278880"/>
-            <a:ext cx="11277600" cy="302361"/>
-          </a:xfrm>
-          <a:prstGeom prst="rect">
-            <a:avLst/>
-          </a:prstGeom>
-          <a:noFill/>
-          <a:effectLst/>
-        </p:spPr>
-        <p:txBody>
-          <a:bodyPr wrap="none" lIns="27432" rIns="27432" tIns="18288" bIns="18288" anchor="ctr">
-            <a:spAutoFit/>
-          </a:bodyPr>
-          <a:lstStyle/>
-          <a:p>
-            <a:pPr algn="l">
-              <a:spcAft>
-                <a:spcPts val="0"/>
-              </a:spcAft>
-            </a:pPr>
-            <a:r>
-              <a:rPr sz="1536" b="0" i="0">
+              <a:rPr sz="1000" b="0" i="0">
                 <a:solidFill>
                   <a:srgbClr val="B4C7D2"/>
                 </a:solidFill>
                 <a:latin typeface="Arial"/>
               </a:rPr>
-              <a:t>PFC-core radius is not the subsequent bubble radius</a:t>
-            </a:r>
-          </a:p>
-        </p:txBody>
-      </p:sp>
-      <p:sp>
-        <p:nvSpPr>
-          <p:cNvPr id="17" name="text16" descr="sci-ppt:C2-E11-016"/>
-          <p:cNvSpPr txBox="1"/>
-          <p:nvPr/>
-        </p:nvSpPr>
-        <p:spPr>
-          <a:xfrm>
-            <a:off x="365760" y="6571488"/>
-            <a:ext cx="11277600" cy="302361"/>
-          </a:xfrm>
-          <a:prstGeom prst="rect">
-            <a:avLst/>
-          </a:prstGeom>
-          <a:noFill/>
-          <a:effectLst/>
-        </p:spPr>
-        <p:txBody>
-          <a:bodyPr wrap="none" lIns="27432" rIns="27432" tIns="18288" bIns="18288" anchor="ctr">
-            <a:spAutoFit/>
-          </a:bodyPr>
-          <a:lstStyle/>
-          <a:p>
-            <a:pPr algn="l">
-              <a:spcAft>
-                <a:spcPts val="0"/>
-              </a:spcAft>
-            </a:pPr>
-            <a:r>
-              <a:rPr sz="1536" b="0" i="0">
-                <a:solidFill>
-                  <a:srgbClr val="B4C7D2"/>
-                </a:solidFill>
-                <a:latin typeface="Arial"/>
-              </a:rPr>
-              <a:t>A nanodroplet may need much more local pressure than a micron core</a:t>
+              <a:t>Static capillary control of Eq. C2-E11.</a:t>
             </a:r>
           </a:p>
         </p:txBody>
